--- a/ppt/6.MSA 프로젝트에서 Kafka 도입하기.pptx
+++ b/ppt/6.MSA 프로젝트에서 Kafka 도입하기.pptx
@@ -401,7 +401,7 @@
           <a:p>
             <a:fld id="{27BAF1FF-D996-4646-93C3-0714F2310045}" type="datetimeFigureOut">
               <a:rPr lang="ko-KR" altLang="en-US" smtClean="0"/>
-              <a:t>2026-08-14</a:t>
+              <a:t>2026-08-15</a:t>
             </a:fld>
             <a:endParaRPr lang="ko-KR" altLang="en-US"/>
           </a:p>
@@ -609,7 +609,7 @@
           <a:p>
             <a:fld id="{27BAF1FF-D996-4646-93C3-0714F2310045}" type="datetimeFigureOut">
               <a:rPr lang="ko-KR" altLang="en-US" smtClean="0"/>
-              <a:t>2026-08-14</a:t>
+              <a:t>2026-08-15</a:t>
             </a:fld>
             <a:endParaRPr lang="ko-KR" altLang="en-US"/>
           </a:p>
@@ -865,7 +865,7 @@
           <a:p>
             <a:fld id="{27BAF1FF-D996-4646-93C3-0714F2310045}" type="datetimeFigureOut">
               <a:rPr lang="ko-KR" altLang="en-US" smtClean="0"/>
-              <a:t>2026-08-14</a:t>
+              <a:t>2026-08-15</a:t>
             </a:fld>
             <a:endParaRPr lang="ko-KR" altLang="en-US"/>
           </a:p>
@@ -1039,7 +1039,7 @@
           <a:p>
             <a:fld id="{27BAF1FF-D996-4646-93C3-0714F2310045}" type="datetimeFigureOut">
               <a:rPr lang="ko-KR" altLang="en-US" smtClean="0"/>
-              <a:t>2026-08-14</a:t>
+              <a:t>2026-08-15</a:t>
             </a:fld>
             <a:endParaRPr lang="ko-KR" altLang="en-US"/>
           </a:p>
@@ -1382,7 +1382,7 @@
           <a:p>
             <a:fld id="{27BAF1FF-D996-4646-93C3-0714F2310045}" type="datetimeFigureOut">
               <a:rPr lang="ko-KR" altLang="en-US" smtClean="0"/>
-              <a:t>2026-08-14</a:t>
+              <a:t>2026-08-15</a:t>
             </a:fld>
             <a:endParaRPr lang="ko-KR" altLang="en-US"/>
           </a:p>
@@ -1657,7 +1657,7 @@
           <a:p>
             <a:fld id="{27BAF1FF-D996-4646-93C3-0714F2310045}" type="datetimeFigureOut">
               <a:rPr lang="ko-KR" altLang="en-US" smtClean="0"/>
-              <a:t>2026-08-14</a:t>
+              <a:t>2026-08-15</a:t>
             </a:fld>
             <a:endParaRPr lang="ko-KR" altLang="en-US"/>
           </a:p>
@@ -2036,7 +2036,7 @@
           <a:p>
             <a:fld id="{27BAF1FF-D996-4646-93C3-0714F2310045}" type="datetimeFigureOut">
               <a:rPr lang="ko-KR" altLang="en-US" smtClean="0"/>
-              <a:t>2026-08-14</a:t>
+              <a:t>2026-08-15</a:t>
             </a:fld>
             <a:endParaRPr lang="ko-KR" altLang="en-US"/>
           </a:p>
@@ -2154,7 +2154,7 @@
           <a:p>
             <a:fld id="{27BAF1FF-D996-4646-93C3-0714F2310045}" type="datetimeFigureOut">
               <a:rPr lang="ko-KR" altLang="en-US" smtClean="0"/>
-              <a:t>2026-08-14</a:t>
+              <a:t>2026-08-15</a:t>
             </a:fld>
             <a:endParaRPr lang="ko-KR" altLang="en-US"/>
           </a:p>
@@ -2325,7 +2325,7 @@
           <a:p>
             <a:fld id="{27BAF1FF-D996-4646-93C3-0714F2310045}" type="datetimeFigureOut">
               <a:rPr lang="ko-KR" altLang="en-US" smtClean="0"/>
-              <a:t>2026-08-14</a:t>
+              <a:t>2026-08-15</a:t>
             </a:fld>
             <a:endParaRPr lang="ko-KR" altLang="en-US"/>
           </a:p>
@@ -2679,7 +2679,7 @@
           <a:p>
             <a:fld id="{27BAF1FF-D996-4646-93C3-0714F2310045}" type="datetimeFigureOut">
               <a:rPr lang="ko-KR" altLang="en-US" smtClean="0"/>
-              <a:t>2026-08-14</a:t>
+              <a:t>2026-08-15</a:t>
             </a:fld>
             <a:endParaRPr lang="ko-KR" altLang="en-US"/>
           </a:p>
@@ -3061,7 +3061,7 @@
           <a:p>
             <a:fld id="{27BAF1FF-D996-4646-93C3-0714F2310045}" type="datetimeFigureOut">
               <a:rPr lang="ko-KR" altLang="en-US" smtClean="0"/>
-              <a:t>2026-08-14</a:t>
+              <a:t>2026-08-15</a:t>
             </a:fld>
             <a:endParaRPr lang="ko-KR" altLang="en-US"/>
           </a:p>
@@ -3348,7 +3348,7 @@
           <a:p>
             <a:fld id="{27BAF1FF-D996-4646-93C3-0714F2310045}" type="datetimeFigureOut">
               <a:rPr lang="ko-KR" altLang="en-US" smtClean="0"/>
-              <a:t>2026-08-14</a:t>
+              <a:t>2026-08-15</a:t>
             </a:fld>
             <a:endParaRPr lang="ko-KR" altLang="en-US"/>
           </a:p>
